--- a/startup/TerraBlock_Investor_Presentation.pptx
+++ b/startup/TerraBlock_Investor_Presentation.pptx
@@ -3305,7 +3305,7 @@
                 <a:ea typeface="Cambria" pitchFamily="34" charset="-122"/>
                 <a:cs typeface="Cambria" pitchFamily="34" charset="-120"/>
               </a:rPr>
-              <a:t>Telangana's first machine-made mud interlocking brick</a:t>
+              <a:t>Telangana's First Mud Brick Industries</a:t>
             </a:r>
             <a:endParaRPr lang="en-US" sz="2200" dirty="0"/>
           </a:p>
